--- a/analysis/submitted_analyses/attentional_choice_biases.pptx
+++ b/analysis/submitted_analyses/attentional_choice_biases.pptx
@@ -2,12 +2,12 @@
 <file path=ppt/presentation.xml><?xml version="1.0" encoding="utf-8"?>
 <p:presentation xmlns:a="http://schemas.openxmlformats.org/drawingml/2006/main" xmlns:r="http://schemas.openxmlformats.org/officeDocument/2006/relationships" xmlns:p="http://schemas.openxmlformats.org/presentationml/2006/main" saveSubsetFonts="1" autoCompressPictures="0">
   <p:sldMasterIdLst>
-    <p:sldMasterId id="2147483684" r:id="rId1"/>
+    <p:sldMasterId id="2147483696" r:id="rId1"/>
   </p:sldMasterIdLst>
   <p:sldIdLst>
     <p:sldId id="257" r:id="rId2"/>
   </p:sldIdLst>
-  <p:sldSz cx="16459200" cy="11430000"/>
+  <p:sldSz cx="16459200" cy="7772400"/>
   <p:notesSz cx="6858000" cy="9144000"/>
   <p:defaultTextStyle>
     <a:defPPr>
@@ -141,15 +141,15 @@
         </p:nvSpPr>
         <p:spPr>
           <a:xfrm>
-            <a:off x="1234440" y="1870605"/>
-            <a:ext cx="13990320" cy="3979333"/>
+            <a:off x="2057400" y="1272011"/>
+            <a:ext cx="12344400" cy="2705947"/>
           </a:xfrm>
         </p:spPr>
         <p:txBody>
           <a:bodyPr anchor="b"/>
           <a:lstStyle>
             <a:lvl1pPr algn="ctr">
-              <a:defRPr sz="10000"/>
+              <a:defRPr sz="6800"/>
             </a:lvl1pPr>
           </a:lstStyle>
           <a:p>
@@ -173,8 +173,8 @@
         </p:nvSpPr>
         <p:spPr>
           <a:xfrm>
-            <a:off x="2057400" y="6003397"/>
-            <a:ext cx="12344400" cy="2759603"/>
+            <a:off x="2057400" y="4082310"/>
+            <a:ext cx="12344400" cy="1876530"/>
           </a:xfrm>
         </p:spPr>
         <p:txBody>
@@ -182,39 +182,39 @@
           <a:lstStyle>
             <a:lvl1pPr marL="0" indent="0" algn="ctr">
               <a:buNone/>
-              <a:defRPr sz="4000"/>
+              <a:defRPr sz="2720"/>
             </a:lvl1pPr>
-            <a:lvl2pPr marL="762015" indent="0" algn="ctr">
-              <a:buNone/>
-              <a:defRPr sz="3333"/>
+            <a:lvl2pPr marL="518145" indent="0" algn="ctr">
+              <a:buNone/>
+              <a:defRPr sz="2267"/>
             </a:lvl2pPr>
-            <a:lvl3pPr marL="1524030" indent="0" algn="ctr">
-              <a:buNone/>
-              <a:defRPr sz="3000"/>
+            <a:lvl3pPr marL="1036290" indent="0" algn="ctr">
+              <a:buNone/>
+              <a:defRPr sz="2040"/>
             </a:lvl3pPr>
-            <a:lvl4pPr marL="2286046" indent="0" algn="ctr">
-              <a:buNone/>
-              <a:defRPr sz="2667"/>
+            <a:lvl4pPr marL="1554434" indent="0" algn="ctr">
+              <a:buNone/>
+              <a:defRPr sz="1813"/>
             </a:lvl4pPr>
-            <a:lvl5pPr marL="3048061" indent="0" algn="ctr">
-              <a:buNone/>
-              <a:defRPr sz="2667"/>
+            <a:lvl5pPr marL="2072579" indent="0" algn="ctr">
+              <a:buNone/>
+              <a:defRPr sz="1813"/>
             </a:lvl5pPr>
-            <a:lvl6pPr marL="3810076" indent="0" algn="ctr">
-              <a:buNone/>
-              <a:defRPr sz="2667"/>
+            <a:lvl6pPr marL="2590724" indent="0" algn="ctr">
+              <a:buNone/>
+              <a:defRPr sz="1813"/>
             </a:lvl6pPr>
-            <a:lvl7pPr marL="4572091" indent="0" algn="ctr">
-              <a:buNone/>
-              <a:defRPr sz="2667"/>
+            <a:lvl7pPr marL="3108869" indent="0" algn="ctr">
+              <a:buNone/>
+              <a:defRPr sz="1813"/>
             </a:lvl7pPr>
-            <a:lvl8pPr marL="5334107" indent="0" algn="ctr">
-              <a:buNone/>
-              <a:defRPr sz="2667"/>
+            <a:lvl8pPr marL="3627013" indent="0" algn="ctr">
+              <a:buNone/>
+              <a:defRPr sz="1813"/>
             </a:lvl8pPr>
-            <a:lvl9pPr marL="6096122" indent="0" algn="ctr">
-              <a:buNone/>
-              <a:defRPr sz="2667"/>
+            <a:lvl9pPr marL="4145158" indent="0" algn="ctr">
+              <a:buNone/>
+              <a:defRPr sz="1813"/>
             </a:lvl9pPr>
           </a:lstStyle>
           <a:p>
@@ -243,7 +243,7 @@
           <a:p>
             <a:fld id="{CFC60B5F-2253-DF41-8690-61B53F1555CE}" type="datetimeFigureOut">
               <a:rPr lang="en-US" smtClean="0"/>
-              <a:t>6/16/24</a:t>
+              <a:t>7/2/24</a:t>
             </a:fld>
             <a:endParaRPr lang="en-US"/>
           </a:p>
@@ -294,7 +294,7 @@
     </p:spTree>
     <p:extLst>
       <p:ext uri="{BB962C8B-B14F-4D97-AF65-F5344CB8AC3E}">
-        <p14:creationId xmlns:p14="http://schemas.microsoft.com/office/powerpoint/2010/main" val="2601182167"/>
+        <p14:creationId xmlns:p14="http://schemas.microsoft.com/office/powerpoint/2010/main" val="3363758481"/>
       </p:ext>
     </p:extLst>
   </p:cSld>
@@ -413,7 +413,7 @@
           <a:p>
             <a:fld id="{CFC60B5F-2253-DF41-8690-61B53F1555CE}" type="datetimeFigureOut">
               <a:rPr lang="en-US" smtClean="0"/>
-              <a:t>6/16/24</a:t>
+              <a:t>7/2/24</a:t>
             </a:fld>
             <a:endParaRPr lang="en-US"/>
           </a:p>
@@ -464,7 +464,7 @@
     </p:spTree>
     <p:extLst>
       <p:ext uri="{BB962C8B-B14F-4D97-AF65-F5344CB8AC3E}">
-        <p14:creationId xmlns:p14="http://schemas.microsoft.com/office/powerpoint/2010/main" val="853774185"/>
+        <p14:creationId xmlns:p14="http://schemas.microsoft.com/office/powerpoint/2010/main" val="267366487"/>
       </p:ext>
     </p:extLst>
   </p:cSld>
@@ -503,8 +503,8 @@
         </p:nvSpPr>
         <p:spPr>
           <a:xfrm>
-            <a:off x="11778616" y="608541"/>
-            <a:ext cx="3549015" cy="9686397"/>
+            <a:off x="11778615" y="413808"/>
+            <a:ext cx="3549015" cy="6586750"/>
           </a:xfrm>
         </p:spPr>
         <p:txBody>
@@ -531,8 +531,8 @@
         </p:nvSpPr>
         <p:spPr>
           <a:xfrm>
-            <a:off x="1131571" y="608541"/>
-            <a:ext cx="10441305" cy="9686397"/>
+            <a:off x="1131570" y="413808"/>
+            <a:ext cx="10441305" cy="6586750"/>
           </a:xfrm>
         </p:spPr>
         <p:txBody>
@@ -593,7 +593,7 @@
           <a:p>
             <a:fld id="{CFC60B5F-2253-DF41-8690-61B53F1555CE}" type="datetimeFigureOut">
               <a:rPr lang="en-US" smtClean="0"/>
-              <a:t>6/16/24</a:t>
+              <a:t>7/2/24</a:t>
             </a:fld>
             <a:endParaRPr lang="en-US"/>
           </a:p>
@@ -644,7 +644,7 @@
     </p:spTree>
     <p:extLst>
       <p:ext uri="{BB962C8B-B14F-4D97-AF65-F5344CB8AC3E}">
-        <p14:creationId xmlns:p14="http://schemas.microsoft.com/office/powerpoint/2010/main" val="1138343423"/>
+        <p14:creationId xmlns:p14="http://schemas.microsoft.com/office/powerpoint/2010/main" val="101448185"/>
       </p:ext>
     </p:extLst>
   </p:cSld>
@@ -763,7 +763,7 @@
           <a:p>
             <a:fld id="{CFC60B5F-2253-DF41-8690-61B53F1555CE}" type="datetimeFigureOut">
               <a:rPr lang="en-US" smtClean="0"/>
-              <a:t>6/16/24</a:t>
+              <a:t>7/2/24</a:t>
             </a:fld>
             <a:endParaRPr lang="en-US"/>
           </a:p>
@@ -814,7 +814,7 @@
     </p:spTree>
     <p:extLst>
       <p:ext uri="{BB962C8B-B14F-4D97-AF65-F5344CB8AC3E}">
-        <p14:creationId xmlns:p14="http://schemas.microsoft.com/office/powerpoint/2010/main" val="2558003282"/>
+        <p14:creationId xmlns:p14="http://schemas.microsoft.com/office/powerpoint/2010/main" val="3858233283"/>
       </p:ext>
     </p:extLst>
   </p:cSld>
@@ -853,15 +853,15 @@
         </p:nvSpPr>
         <p:spPr>
           <a:xfrm>
-            <a:off x="1122998" y="2849566"/>
-            <a:ext cx="14196060" cy="4754562"/>
+            <a:off x="1122997" y="1937704"/>
+            <a:ext cx="14196060" cy="3233102"/>
           </a:xfrm>
         </p:spPr>
         <p:txBody>
           <a:bodyPr anchor="b"/>
           <a:lstStyle>
             <a:lvl1pPr>
-              <a:defRPr sz="10000"/>
+              <a:defRPr sz="6800"/>
             </a:lvl1pPr>
           </a:lstStyle>
           <a:p>
@@ -885,8 +885,8 @@
         </p:nvSpPr>
         <p:spPr>
           <a:xfrm>
-            <a:off x="1122998" y="7649107"/>
-            <a:ext cx="14196060" cy="2500312"/>
+            <a:off x="1122997" y="5201392"/>
+            <a:ext cx="14196060" cy="1700212"/>
           </a:xfrm>
         </p:spPr>
         <p:txBody>
@@ -894,15 +894,17 @@
           <a:lstStyle>
             <a:lvl1pPr marL="0" indent="0">
               <a:buNone/>
-              <a:defRPr sz="4000">
+              <a:defRPr sz="2720">
                 <a:solidFill>
-                  <a:schemeClr val="tx1"/>
+                  <a:schemeClr val="tx1">
+                    <a:tint val="75000"/>
+                  </a:schemeClr>
                 </a:solidFill>
               </a:defRPr>
             </a:lvl1pPr>
-            <a:lvl2pPr marL="762015" indent="0">
-              <a:buNone/>
-              <a:defRPr sz="3333">
+            <a:lvl2pPr marL="518145" indent="0">
+              <a:buNone/>
+              <a:defRPr sz="2267">
                 <a:solidFill>
                   <a:schemeClr val="tx1">
                     <a:tint val="75000"/>
@@ -910,9 +912,9 @@
                 </a:solidFill>
               </a:defRPr>
             </a:lvl2pPr>
-            <a:lvl3pPr marL="1524030" indent="0">
-              <a:buNone/>
-              <a:defRPr sz="3000">
+            <a:lvl3pPr marL="1036290" indent="0">
+              <a:buNone/>
+              <a:defRPr sz="2040">
                 <a:solidFill>
                   <a:schemeClr val="tx1">
                     <a:tint val="75000"/>
@@ -920,9 +922,9 @@
                 </a:solidFill>
               </a:defRPr>
             </a:lvl3pPr>
-            <a:lvl4pPr marL="2286046" indent="0">
-              <a:buNone/>
-              <a:defRPr sz="2667">
+            <a:lvl4pPr marL="1554434" indent="0">
+              <a:buNone/>
+              <a:defRPr sz="1813">
                 <a:solidFill>
                   <a:schemeClr val="tx1">
                     <a:tint val="75000"/>
@@ -930,9 +932,9 @@
                 </a:solidFill>
               </a:defRPr>
             </a:lvl4pPr>
-            <a:lvl5pPr marL="3048061" indent="0">
-              <a:buNone/>
-              <a:defRPr sz="2667">
+            <a:lvl5pPr marL="2072579" indent="0">
+              <a:buNone/>
+              <a:defRPr sz="1813">
                 <a:solidFill>
                   <a:schemeClr val="tx1">
                     <a:tint val="75000"/>
@@ -940,9 +942,9 @@
                 </a:solidFill>
               </a:defRPr>
             </a:lvl5pPr>
-            <a:lvl6pPr marL="3810076" indent="0">
-              <a:buNone/>
-              <a:defRPr sz="2667">
+            <a:lvl6pPr marL="2590724" indent="0">
+              <a:buNone/>
+              <a:defRPr sz="1813">
                 <a:solidFill>
                   <a:schemeClr val="tx1">
                     <a:tint val="75000"/>
@@ -950,9 +952,9 @@
                 </a:solidFill>
               </a:defRPr>
             </a:lvl6pPr>
-            <a:lvl7pPr marL="4572091" indent="0">
-              <a:buNone/>
-              <a:defRPr sz="2667">
+            <a:lvl7pPr marL="3108869" indent="0">
+              <a:buNone/>
+              <a:defRPr sz="1813">
                 <a:solidFill>
                   <a:schemeClr val="tx1">
                     <a:tint val="75000"/>
@@ -960,9 +962,9 @@
                 </a:solidFill>
               </a:defRPr>
             </a:lvl7pPr>
-            <a:lvl8pPr marL="5334107" indent="0">
-              <a:buNone/>
-              <a:defRPr sz="2667">
+            <a:lvl8pPr marL="3627013" indent="0">
+              <a:buNone/>
+              <a:defRPr sz="1813">
                 <a:solidFill>
                   <a:schemeClr val="tx1">
                     <a:tint val="75000"/>
@@ -970,9 +972,9 @@
                 </a:solidFill>
               </a:defRPr>
             </a:lvl8pPr>
-            <a:lvl9pPr marL="6096122" indent="0">
-              <a:buNone/>
-              <a:defRPr sz="2667">
+            <a:lvl9pPr marL="4145158" indent="0">
+              <a:buNone/>
+              <a:defRPr sz="1813">
                 <a:solidFill>
                   <a:schemeClr val="tx1">
                     <a:tint val="75000"/>
@@ -1007,7 +1009,7 @@
           <a:p>
             <a:fld id="{CFC60B5F-2253-DF41-8690-61B53F1555CE}" type="datetimeFigureOut">
               <a:rPr lang="en-US" smtClean="0"/>
-              <a:t>6/16/24</a:t>
+              <a:t>7/2/24</a:t>
             </a:fld>
             <a:endParaRPr lang="en-US"/>
           </a:p>
@@ -1058,7 +1060,7 @@
     </p:spTree>
     <p:extLst>
       <p:ext uri="{BB962C8B-B14F-4D97-AF65-F5344CB8AC3E}">
-        <p14:creationId xmlns:p14="http://schemas.microsoft.com/office/powerpoint/2010/main" val="1104442612"/>
+        <p14:creationId xmlns:p14="http://schemas.microsoft.com/office/powerpoint/2010/main" val="4046296365"/>
       </p:ext>
     </p:extLst>
   </p:cSld>
@@ -1120,8 +1122,8 @@
         </p:nvSpPr>
         <p:spPr>
           <a:xfrm>
-            <a:off x="1131570" y="3042708"/>
-            <a:ext cx="6995160" cy="7252230"/>
+            <a:off x="1131570" y="2069042"/>
+            <a:ext cx="6995160" cy="4931516"/>
           </a:xfrm>
         </p:spPr>
         <p:txBody>
@@ -1177,8 +1179,8 @@
         </p:nvSpPr>
         <p:spPr>
           <a:xfrm>
-            <a:off x="8332470" y="3042708"/>
-            <a:ext cx="6995160" cy="7252230"/>
+            <a:off x="8332470" y="2069042"/>
+            <a:ext cx="6995160" cy="4931516"/>
           </a:xfrm>
         </p:spPr>
         <p:txBody>
@@ -1239,7 +1241,7 @@
           <a:p>
             <a:fld id="{CFC60B5F-2253-DF41-8690-61B53F1555CE}" type="datetimeFigureOut">
               <a:rPr lang="en-US" smtClean="0"/>
-              <a:t>6/16/24</a:t>
+              <a:t>7/2/24</a:t>
             </a:fld>
             <a:endParaRPr lang="en-US"/>
           </a:p>
@@ -1290,7 +1292,7 @@
     </p:spTree>
     <p:extLst>
       <p:ext uri="{BB962C8B-B14F-4D97-AF65-F5344CB8AC3E}">
-        <p14:creationId xmlns:p14="http://schemas.microsoft.com/office/powerpoint/2010/main" val="2435657852"/>
+        <p14:creationId xmlns:p14="http://schemas.microsoft.com/office/powerpoint/2010/main" val="3105981665"/>
       </p:ext>
     </p:extLst>
   </p:cSld>
@@ -1329,8 +1331,8 @@
         </p:nvSpPr>
         <p:spPr>
           <a:xfrm>
-            <a:off x="1133714" y="608544"/>
-            <a:ext cx="14196060" cy="2209272"/>
+            <a:off x="1133714" y="413809"/>
+            <a:ext cx="14196060" cy="1502305"/>
           </a:xfrm>
         </p:spPr>
         <p:txBody>
@@ -1357,8 +1359,8 @@
         </p:nvSpPr>
         <p:spPr>
           <a:xfrm>
-            <a:off x="1133716" y="2801938"/>
-            <a:ext cx="6963012" cy="1373187"/>
+            <a:off x="1133715" y="1905318"/>
+            <a:ext cx="6963012" cy="933767"/>
           </a:xfrm>
         </p:spPr>
         <p:txBody>
@@ -1366,39 +1368,39 @@
           <a:lstStyle>
             <a:lvl1pPr marL="0" indent="0">
               <a:buNone/>
-              <a:defRPr sz="4000" b="1"/>
+              <a:defRPr sz="2720" b="1"/>
             </a:lvl1pPr>
-            <a:lvl2pPr marL="762015" indent="0">
-              <a:buNone/>
-              <a:defRPr sz="3333" b="1"/>
+            <a:lvl2pPr marL="518145" indent="0">
+              <a:buNone/>
+              <a:defRPr sz="2267" b="1"/>
             </a:lvl2pPr>
-            <a:lvl3pPr marL="1524030" indent="0">
-              <a:buNone/>
-              <a:defRPr sz="3000" b="1"/>
+            <a:lvl3pPr marL="1036290" indent="0">
+              <a:buNone/>
+              <a:defRPr sz="2040" b="1"/>
             </a:lvl3pPr>
-            <a:lvl4pPr marL="2286046" indent="0">
-              <a:buNone/>
-              <a:defRPr sz="2667" b="1"/>
+            <a:lvl4pPr marL="1554434" indent="0">
+              <a:buNone/>
+              <a:defRPr sz="1813" b="1"/>
             </a:lvl4pPr>
-            <a:lvl5pPr marL="3048061" indent="0">
-              <a:buNone/>
-              <a:defRPr sz="2667" b="1"/>
+            <a:lvl5pPr marL="2072579" indent="0">
+              <a:buNone/>
+              <a:defRPr sz="1813" b="1"/>
             </a:lvl5pPr>
-            <a:lvl6pPr marL="3810076" indent="0">
-              <a:buNone/>
-              <a:defRPr sz="2667" b="1"/>
+            <a:lvl6pPr marL="2590724" indent="0">
+              <a:buNone/>
+              <a:defRPr sz="1813" b="1"/>
             </a:lvl6pPr>
-            <a:lvl7pPr marL="4572091" indent="0">
-              <a:buNone/>
-              <a:defRPr sz="2667" b="1"/>
+            <a:lvl7pPr marL="3108869" indent="0">
+              <a:buNone/>
+              <a:defRPr sz="1813" b="1"/>
             </a:lvl7pPr>
-            <a:lvl8pPr marL="5334107" indent="0">
-              <a:buNone/>
-              <a:defRPr sz="2667" b="1"/>
+            <a:lvl8pPr marL="3627013" indent="0">
+              <a:buNone/>
+              <a:defRPr sz="1813" b="1"/>
             </a:lvl8pPr>
-            <a:lvl9pPr marL="6096122" indent="0">
-              <a:buNone/>
-              <a:defRPr sz="2667" b="1"/>
+            <a:lvl9pPr marL="4145158" indent="0">
+              <a:buNone/>
+              <a:defRPr sz="1813" b="1"/>
             </a:lvl9pPr>
           </a:lstStyle>
           <a:p>
@@ -1422,8 +1424,8 @@
         </p:nvSpPr>
         <p:spPr>
           <a:xfrm>
-            <a:off x="1133716" y="4175125"/>
-            <a:ext cx="6963012" cy="6140980"/>
+            <a:off x="1133715" y="2839085"/>
+            <a:ext cx="6963012" cy="4175866"/>
           </a:xfrm>
         </p:spPr>
         <p:txBody>
@@ -1479,8 +1481,8 @@
         </p:nvSpPr>
         <p:spPr>
           <a:xfrm>
-            <a:off x="8332471" y="2801938"/>
-            <a:ext cx="6997304" cy="1373187"/>
+            <a:off x="8332470" y="1905318"/>
+            <a:ext cx="6997304" cy="933767"/>
           </a:xfrm>
         </p:spPr>
         <p:txBody>
@@ -1488,39 +1490,39 @@
           <a:lstStyle>
             <a:lvl1pPr marL="0" indent="0">
               <a:buNone/>
-              <a:defRPr sz="4000" b="1"/>
+              <a:defRPr sz="2720" b="1"/>
             </a:lvl1pPr>
-            <a:lvl2pPr marL="762015" indent="0">
-              <a:buNone/>
-              <a:defRPr sz="3333" b="1"/>
+            <a:lvl2pPr marL="518145" indent="0">
+              <a:buNone/>
+              <a:defRPr sz="2267" b="1"/>
             </a:lvl2pPr>
-            <a:lvl3pPr marL="1524030" indent="0">
-              <a:buNone/>
-              <a:defRPr sz="3000" b="1"/>
+            <a:lvl3pPr marL="1036290" indent="0">
+              <a:buNone/>
+              <a:defRPr sz="2040" b="1"/>
             </a:lvl3pPr>
-            <a:lvl4pPr marL="2286046" indent="0">
-              <a:buNone/>
-              <a:defRPr sz="2667" b="1"/>
+            <a:lvl4pPr marL="1554434" indent="0">
+              <a:buNone/>
+              <a:defRPr sz="1813" b="1"/>
             </a:lvl4pPr>
-            <a:lvl5pPr marL="3048061" indent="0">
-              <a:buNone/>
-              <a:defRPr sz="2667" b="1"/>
+            <a:lvl5pPr marL="2072579" indent="0">
+              <a:buNone/>
+              <a:defRPr sz="1813" b="1"/>
             </a:lvl5pPr>
-            <a:lvl6pPr marL="3810076" indent="0">
-              <a:buNone/>
-              <a:defRPr sz="2667" b="1"/>
+            <a:lvl6pPr marL="2590724" indent="0">
+              <a:buNone/>
+              <a:defRPr sz="1813" b="1"/>
             </a:lvl6pPr>
-            <a:lvl7pPr marL="4572091" indent="0">
-              <a:buNone/>
-              <a:defRPr sz="2667" b="1"/>
+            <a:lvl7pPr marL="3108869" indent="0">
+              <a:buNone/>
+              <a:defRPr sz="1813" b="1"/>
             </a:lvl7pPr>
-            <a:lvl8pPr marL="5334107" indent="0">
-              <a:buNone/>
-              <a:defRPr sz="2667" b="1"/>
+            <a:lvl8pPr marL="3627013" indent="0">
+              <a:buNone/>
+              <a:defRPr sz="1813" b="1"/>
             </a:lvl8pPr>
-            <a:lvl9pPr marL="6096122" indent="0">
-              <a:buNone/>
-              <a:defRPr sz="2667" b="1"/>
+            <a:lvl9pPr marL="4145158" indent="0">
+              <a:buNone/>
+              <a:defRPr sz="1813" b="1"/>
             </a:lvl9pPr>
           </a:lstStyle>
           <a:p>
@@ -1544,8 +1546,8 @@
         </p:nvSpPr>
         <p:spPr>
           <a:xfrm>
-            <a:off x="8332471" y="4175125"/>
-            <a:ext cx="6997304" cy="6140980"/>
+            <a:off x="8332470" y="2839085"/>
+            <a:ext cx="6997304" cy="4175866"/>
           </a:xfrm>
         </p:spPr>
         <p:txBody>
@@ -1606,7 +1608,7 @@
           <a:p>
             <a:fld id="{CFC60B5F-2253-DF41-8690-61B53F1555CE}" type="datetimeFigureOut">
               <a:rPr lang="en-US" smtClean="0"/>
-              <a:t>6/16/24</a:t>
+              <a:t>7/2/24</a:t>
             </a:fld>
             <a:endParaRPr lang="en-US"/>
           </a:p>
@@ -1657,7 +1659,7 @@
     </p:spTree>
     <p:extLst>
       <p:ext uri="{BB962C8B-B14F-4D97-AF65-F5344CB8AC3E}">
-        <p14:creationId xmlns:p14="http://schemas.microsoft.com/office/powerpoint/2010/main" val="3485230942"/>
+        <p14:creationId xmlns:p14="http://schemas.microsoft.com/office/powerpoint/2010/main" val="2648191040"/>
       </p:ext>
     </p:extLst>
   </p:cSld>
@@ -1724,7 +1726,7 @@
           <a:p>
             <a:fld id="{CFC60B5F-2253-DF41-8690-61B53F1555CE}" type="datetimeFigureOut">
               <a:rPr lang="en-US" smtClean="0"/>
-              <a:t>6/16/24</a:t>
+              <a:t>7/2/24</a:t>
             </a:fld>
             <a:endParaRPr lang="en-US"/>
           </a:p>
@@ -1775,7 +1777,7 @@
     </p:spTree>
     <p:extLst>
       <p:ext uri="{BB962C8B-B14F-4D97-AF65-F5344CB8AC3E}">
-        <p14:creationId xmlns:p14="http://schemas.microsoft.com/office/powerpoint/2010/main" val="2116683119"/>
+        <p14:creationId xmlns:p14="http://schemas.microsoft.com/office/powerpoint/2010/main" val="4096308678"/>
       </p:ext>
     </p:extLst>
   </p:cSld>
@@ -1819,7 +1821,7 @@
           <a:p>
             <a:fld id="{CFC60B5F-2253-DF41-8690-61B53F1555CE}" type="datetimeFigureOut">
               <a:rPr lang="en-US" smtClean="0"/>
-              <a:t>6/16/24</a:t>
+              <a:t>7/2/24</a:t>
             </a:fld>
             <a:endParaRPr lang="en-US"/>
           </a:p>
@@ -1870,7 +1872,7 @@
     </p:spTree>
     <p:extLst>
       <p:ext uri="{BB962C8B-B14F-4D97-AF65-F5344CB8AC3E}">
-        <p14:creationId xmlns:p14="http://schemas.microsoft.com/office/powerpoint/2010/main" val="3370559800"/>
+        <p14:creationId xmlns:p14="http://schemas.microsoft.com/office/powerpoint/2010/main" val="1904052738"/>
       </p:ext>
     </p:extLst>
   </p:cSld>
@@ -1909,15 +1911,15 @@
         </p:nvSpPr>
         <p:spPr>
           <a:xfrm>
-            <a:off x="1133714" y="762000"/>
-            <a:ext cx="5308520" cy="2667000"/>
+            <a:off x="1133714" y="518160"/>
+            <a:ext cx="5308520" cy="1813560"/>
           </a:xfrm>
         </p:spPr>
         <p:txBody>
           <a:bodyPr anchor="b"/>
           <a:lstStyle>
             <a:lvl1pPr>
-              <a:defRPr sz="5333"/>
+              <a:defRPr sz="3627"/>
             </a:lvl1pPr>
           </a:lstStyle>
           <a:p>
@@ -1941,39 +1943,39 @@
         </p:nvSpPr>
         <p:spPr>
           <a:xfrm>
-            <a:off x="6997304" y="1645711"/>
-            <a:ext cx="8332470" cy="8122708"/>
+            <a:off x="6997304" y="1119082"/>
+            <a:ext cx="8332470" cy="5523442"/>
           </a:xfrm>
         </p:spPr>
         <p:txBody>
           <a:bodyPr/>
           <a:lstStyle>
             <a:lvl1pPr>
-              <a:defRPr sz="5333"/>
+              <a:defRPr sz="3627"/>
             </a:lvl1pPr>
             <a:lvl2pPr>
-              <a:defRPr sz="4667"/>
+              <a:defRPr sz="3173"/>
             </a:lvl2pPr>
             <a:lvl3pPr>
-              <a:defRPr sz="4000"/>
+              <a:defRPr sz="2720"/>
             </a:lvl3pPr>
             <a:lvl4pPr>
-              <a:defRPr sz="3333"/>
+              <a:defRPr sz="2267"/>
             </a:lvl4pPr>
             <a:lvl5pPr>
-              <a:defRPr sz="3333"/>
+              <a:defRPr sz="2267"/>
             </a:lvl5pPr>
             <a:lvl6pPr>
-              <a:defRPr sz="3333"/>
+              <a:defRPr sz="2267"/>
             </a:lvl6pPr>
             <a:lvl7pPr>
-              <a:defRPr sz="3333"/>
+              <a:defRPr sz="2267"/>
             </a:lvl7pPr>
             <a:lvl8pPr>
-              <a:defRPr sz="3333"/>
+              <a:defRPr sz="2267"/>
             </a:lvl8pPr>
             <a:lvl9pPr>
-              <a:defRPr sz="3333"/>
+              <a:defRPr sz="2267"/>
             </a:lvl9pPr>
           </a:lstStyle>
           <a:p>
@@ -2026,8 +2028,8 @@
         </p:nvSpPr>
         <p:spPr>
           <a:xfrm>
-            <a:off x="1133714" y="3429000"/>
-            <a:ext cx="5308520" cy="6352647"/>
+            <a:off x="1133714" y="2331720"/>
+            <a:ext cx="5308520" cy="4319800"/>
           </a:xfrm>
         </p:spPr>
         <p:txBody>
@@ -2035,39 +2037,39 @@
           <a:lstStyle>
             <a:lvl1pPr marL="0" indent="0">
               <a:buNone/>
-              <a:defRPr sz="2667"/>
+              <a:defRPr sz="1813"/>
             </a:lvl1pPr>
-            <a:lvl2pPr marL="762015" indent="0">
-              <a:buNone/>
-              <a:defRPr sz="2333"/>
+            <a:lvl2pPr marL="518145" indent="0">
+              <a:buNone/>
+              <a:defRPr sz="1587"/>
             </a:lvl2pPr>
-            <a:lvl3pPr marL="1524030" indent="0">
-              <a:buNone/>
-              <a:defRPr sz="2000"/>
+            <a:lvl3pPr marL="1036290" indent="0">
+              <a:buNone/>
+              <a:defRPr sz="1360"/>
             </a:lvl3pPr>
-            <a:lvl4pPr marL="2286046" indent="0">
-              <a:buNone/>
-              <a:defRPr sz="1667"/>
+            <a:lvl4pPr marL="1554434" indent="0">
+              <a:buNone/>
+              <a:defRPr sz="1133"/>
             </a:lvl4pPr>
-            <a:lvl5pPr marL="3048061" indent="0">
-              <a:buNone/>
-              <a:defRPr sz="1667"/>
+            <a:lvl5pPr marL="2072579" indent="0">
+              <a:buNone/>
+              <a:defRPr sz="1133"/>
             </a:lvl5pPr>
-            <a:lvl6pPr marL="3810076" indent="0">
-              <a:buNone/>
-              <a:defRPr sz="1667"/>
+            <a:lvl6pPr marL="2590724" indent="0">
+              <a:buNone/>
+              <a:defRPr sz="1133"/>
             </a:lvl6pPr>
-            <a:lvl7pPr marL="4572091" indent="0">
-              <a:buNone/>
-              <a:defRPr sz="1667"/>
+            <a:lvl7pPr marL="3108869" indent="0">
+              <a:buNone/>
+              <a:defRPr sz="1133"/>
             </a:lvl7pPr>
-            <a:lvl8pPr marL="5334107" indent="0">
-              <a:buNone/>
-              <a:defRPr sz="1667"/>
+            <a:lvl8pPr marL="3627013" indent="0">
+              <a:buNone/>
+              <a:defRPr sz="1133"/>
             </a:lvl8pPr>
-            <a:lvl9pPr marL="6096122" indent="0">
-              <a:buNone/>
-              <a:defRPr sz="1667"/>
+            <a:lvl9pPr marL="4145158" indent="0">
+              <a:buNone/>
+              <a:defRPr sz="1133"/>
             </a:lvl9pPr>
           </a:lstStyle>
           <a:p>
@@ -2096,7 +2098,7 @@
           <a:p>
             <a:fld id="{CFC60B5F-2253-DF41-8690-61B53F1555CE}" type="datetimeFigureOut">
               <a:rPr lang="en-US" smtClean="0"/>
-              <a:t>6/16/24</a:t>
+              <a:t>7/2/24</a:t>
             </a:fld>
             <a:endParaRPr lang="en-US"/>
           </a:p>
@@ -2147,7 +2149,7 @@
     </p:spTree>
     <p:extLst>
       <p:ext uri="{BB962C8B-B14F-4D97-AF65-F5344CB8AC3E}">
-        <p14:creationId xmlns:p14="http://schemas.microsoft.com/office/powerpoint/2010/main" val="553167814"/>
+        <p14:creationId xmlns:p14="http://schemas.microsoft.com/office/powerpoint/2010/main" val="708887776"/>
       </p:ext>
     </p:extLst>
   </p:cSld>
@@ -2186,15 +2188,15 @@
         </p:nvSpPr>
         <p:spPr>
           <a:xfrm>
-            <a:off x="1133714" y="762000"/>
-            <a:ext cx="5308520" cy="2667000"/>
+            <a:off x="1133714" y="518160"/>
+            <a:ext cx="5308520" cy="1813560"/>
           </a:xfrm>
         </p:spPr>
         <p:txBody>
           <a:bodyPr anchor="b"/>
           <a:lstStyle>
             <a:lvl1pPr>
-              <a:defRPr sz="5333"/>
+              <a:defRPr sz="3627"/>
             </a:lvl1pPr>
           </a:lstStyle>
           <a:p>
@@ -2218,8 +2220,8 @@
         </p:nvSpPr>
         <p:spPr>
           <a:xfrm>
-            <a:off x="6997304" y="1645711"/>
-            <a:ext cx="8332470" cy="8122708"/>
+            <a:off x="6997304" y="1119082"/>
+            <a:ext cx="8332470" cy="5523442"/>
           </a:xfrm>
         </p:spPr>
         <p:txBody>
@@ -2227,39 +2229,39 @@
           <a:lstStyle>
             <a:lvl1pPr marL="0" indent="0">
               <a:buNone/>
-              <a:defRPr sz="5333"/>
+              <a:defRPr sz="3627"/>
             </a:lvl1pPr>
-            <a:lvl2pPr marL="762015" indent="0">
-              <a:buNone/>
-              <a:defRPr sz="4667"/>
+            <a:lvl2pPr marL="518145" indent="0">
+              <a:buNone/>
+              <a:defRPr sz="3173"/>
             </a:lvl2pPr>
-            <a:lvl3pPr marL="1524030" indent="0">
-              <a:buNone/>
-              <a:defRPr sz="4000"/>
+            <a:lvl3pPr marL="1036290" indent="0">
+              <a:buNone/>
+              <a:defRPr sz="2720"/>
             </a:lvl3pPr>
-            <a:lvl4pPr marL="2286046" indent="0">
-              <a:buNone/>
-              <a:defRPr sz="3333"/>
+            <a:lvl4pPr marL="1554434" indent="0">
+              <a:buNone/>
+              <a:defRPr sz="2267"/>
             </a:lvl4pPr>
-            <a:lvl5pPr marL="3048061" indent="0">
-              <a:buNone/>
-              <a:defRPr sz="3333"/>
+            <a:lvl5pPr marL="2072579" indent="0">
+              <a:buNone/>
+              <a:defRPr sz="2267"/>
             </a:lvl5pPr>
-            <a:lvl6pPr marL="3810076" indent="0">
-              <a:buNone/>
-              <a:defRPr sz="3333"/>
+            <a:lvl6pPr marL="2590724" indent="0">
+              <a:buNone/>
+              <a:defRPr sz="2267"/>
             </a:lvl6pPr>
-            <a:lvl7pPr marL="4572091" indent="0">
-              <a:buNone/>
-              <a:defRPr sz="3333"/>
+            <a:lvl7pPr marL="3108869" indent="0">
+              <a:buNone/>
+              <a:defRPr sz="2267"/>
             </a:lvl7pPr>
-            <a:lvl8pPr marL="5334107" indent="0">
-              <a:buNone/>
-              <a:defRPr sz="3333"/>
+            <a:lvl8pPr marL="3627013" indent="0">
+              <a:buNone/>
+              <a:defRPr sz="2267"/>
             </a:lvl8pPr>
-            <a:lvl9pPr marL="6096122" indent="0">
-              <a:buNone/>
-              <a:defRPr sz="3333"/>
+            <a:lvl9pPr marL="4145158" indent="0">
+              <a:buNone/>
+              <a:defRPr sz="2267"/>
             </a:lvl9pPr>
           </a:lstStyle>
           <a:p>
@@ -2283,8 +2285,8 @@
         </p:nvSpPr>
         <p:spPr>
           <a:xfrm>
-            <a:off x="1133714" y="3429000"/>
-            <a:ext cx="5308520" cy="6352647"/>
+            <a:off x="1133714" y="2331720"/>
+            <a:ext cx="5308520" cy="4319800"/>
           </a:xfrm>
         </p:spPr>
         <p:txBody>
@@ -2292,39 +2294,39 @@
           <a:lstStyle>
             <a:lvl1pPr marL="0" indent="0">
               <a:buNone/>
-              <a:defRPr sz="2667"/>
+              <a:defRPr sz="1813"/>
             </a:lvl1pPr>
-            <a:lvl2pPr marL="762015" indent="0">
-              <a:buNone/>
-              <a:defRPr sz="2333"/>
+            <a:lvl2pPr marL="518145" indent="0">
+              <a:buNone/>
+              <a:defRPr sz="1587"/>
             </a:lvl2pPr>
-            <a:lvl3pPr marL="1524030" indent="0">
-              <a:buNone/>
-              <a:defRPr sz="2000"/>
+            <a:lvl3pPr marL="1036290" indent="0">
+              <a:buNone/>
+              <a:defRPr sz="1360"/>
             </a:lvl3pPr>
-            <a:lvl4pPr marL="2286046" indent="0">
-              <a:buNone/>
-              <a:defRPr sz="1667"/>
+            <a:lvl4pPr marL="1554434" indent="0">
+              <a:buNone/>
+              <a:defRPr sz="1133"/>
             </a:lvl4pPr>
-            <a:lvl5pPr marL="3048061" indent="0">
-              <a:buNone/>
-              <a:defRPr sz="1667"/>
+            <a:lvl5pPr marL="2072579" indent="0">
+              <a:buNone/>
+              <a:defRPr sz="1133"/>
             </a:lvl5pPr>
-            <a:lvl6pPr marL="3810076" indent="0">
-              <a:buNone/>
-              <a:defRPr sz="1667"/>
+            <a:lvl6pPr marL="2590724" indent="0">
+              <a:buNone/>
+              <a:defRPr sz="1133"/>
             </a:lvl6pPr>
-            <a:lvl7pPr marL="4572091" indent="0">
-              <a:buNone/>
-              <a:defRPr sz="1667"/>
+            <a:lvl7pPr marL="3108869" indent="0">
+              <a:buNone/>
+              <a:defRPr sz="1133"/>
             </a:lvl7pPr>
-            <a:lvl8pPr marL="5334107" indent="0">
-              <a:buNone/>
-              <a:defRPr sz="1667"/>
+            <a:lvl8pPr marL="3627013" indent="0">
+              <a:buNone/>
+              <a:defRPr sz="1133"/>
             </a:lvl8pPr>
-            <a:lvl9pPr marL="6096122" indent="0">
-              <a:buNone/>
-              <a:defRPr sz="1667"/>
+            <a:lvl9pPr marL="4145158" indent="0">
+              <a:buNone/>
+              <a:defRPr sz="1133"/>
             </a:lvl9pPr>
           </a:lstStyle>
           <a:p>
@@ -2353,7 +2355,7 @@
           <a:p>
             <a:fld id="{CFC60B5F-2253-DF41-8690-61B53F1555CE}" type="datetimeFigureOut">
               <a:rPr lang="en-US" smtClean="0"/>
-              <a:t>6/16/24</a:t>
+              <a:t>7/2/24</a:t>
             </a:fld>
             <a:endParaRPr lang="en-US"/>
           </a:p>
@@ -2404,7 +2406,7 @@
     </p:spTree>
     <p:extLst>
       <p:ext uri="{BB962C8B-B14F-4D97-AF65-F5344CB8AC3E}">
-        <p14:creationId xmlns:p14="http://schemas.microsoft.com/office/powerpoint/2010/main" val="290734986"/>
+        <p14:creationId xmlns:p14="http://schemas.microsoft.com/office/powerpoint/2010/main" val="1512621528"/>
       </p:ext>
     </p:extLst>
   </p:cSld>
@@ -2448,8 +2450,8 @@
         </p:nvSpPr>
         <p:spPr>
           <a:xfrm>
-            <a:off x="1131570" y="608544"/>
-            <a:ext cx="14196060" cy="2209272"/>
+            <a:off x="1131570" y="413809"/>
+            <a:ext cx="14196060" cy="1502305"/>
           </a:xfrm>
           <a:prstGeom prst="rect">
             <a:avLst/>
@@ -2481,8 +2483,8 @@
         </p:nvSpPr>
         <p:spPr>
           <a:xfrm>
-            <a:off x="1131570" y="3042708"/>
-            <a:ext cx="14196060" cy="7252230"/>
+            <a:off x="1131570" y="2069042"/>
+            <a:ext cx="14196060" cy="4931516"/>
           </a:xfrm>
           <a:prstGeom prst="rect">
             <a:avLst/>
@@ -2543,8 +2545,8 @@
         </p:nvSpPr>
         <p:spPr>
           <a:xfrm>
-            <a:off x="1131570" y="10593919"/>
-            <a:ext cx="3703320" cy="608542"/>
+            <a:off x="1131570" y="7203864"/>
+            <a:ext cx="3703320" cy="413808"/>
           </a:xfrm>
           <a:prstGeom prst="rect">
             <a:avLst/>
@@ -2554,7 +2556,7 @@
           <a:bodyPr vert="horz" lIns="91440" tIns="45720" rIns="91440" bIns="45720" rtlCol="0" anchor="ctr"/>
           <a:lstStyle>
             <a:lvl1pPr algn="l">
-              <a:defRPr sz="2000">
+              <a:defRPr sz="1360">
                 <a:solidFill>
                   <a:schemeClr val="tx1">
                     <a:tint val="75000"/>
@@ -2566,7 +2568,7 @@
           <a:p>
             <a:fld id="{CFC60B5F-2253-DF41-8690-61B53F1555CE}" type="datetimeFigureOut">
               <a:rPr lang="en-US" smtClean="0"/>
-              <a:t>6/16/24</a:t>
+              <a:t>7/2/24</a:t>
             </a:fld>
             <a:endParaRPr lang="en-US"/>
           </a:p>
@@ -2584,8 +2586,8 @@
         </p:nvSpPr>
         <p:spPr>
           <a:xfrm>
-            <a:off x="5452110" y="10593919"/>
-            <a:ext cx="5554980" cy="608542"/>
+            <a:off x="5452110" y="7203864"/>
+            <a:ext cx="5554980" cy="413808"/>
           </a:xfrm>
           <a:prstGeom prst="rect">
             <a:avLst/>
@@ -2595,7 +2597,7 @@
           <a:bodyPr vert="horz" lIns="91440" tIns="45720" rIns="91440" bIns="45720" rtlCol="0" anchor="ctr"/>
           <a:lstStyle>
             <a:lvl1pPr algn="ctr">
-              <a:defRPr sz="2000">
+              <a:defRPr sz="1360">
                 <a:solidFill>
                   <a:schemeClr val="tx1">
                     <a:tint val="75000"/>
@@ -2621,8 +2623,8 @@
         </p:nvSpPr>
         <p:spPr>
           <a:xfrm>
-            <a:off x="11624310" y="10593919"/>
-            <a:ext cx="3703320" cy="608542"/>
+            <a:off x="11624310" y="7203864"/>
+            <a:ext cx="3703320" cy="413808"/>
           </a:xfrm>
           <a:prstGeom prst="rect">
             <a:avLst/>
@@ -2632,7 +2634,7 @@
           <a:bodyPr vert="horz" lIns="91440" tIns="45720" rIns="91440" bIns="45720" rtlCol="0" anchor="ctr"/>
           <a:lstStyle>
             <a:lvl1pPr algn="r">
-              <a:defRPr sz="2000">
+              <a:defRPr sz="1360">
                 <a:solidFill>
                   <a:schemeClr val="tx1">
                     <a:tint val="75000"/>
@@ -2653,27 +2655,27 @@
     </p:spTree>
     <p:extLst>
       <p:ext uri="{BB962C8B-B14F-4D97-AF65-F5344CB8AC3E}">
-        <p14:creationId xmlns:p14="http://schemas.microsoft.com/office/powerpoint/2010/main" val="3383765722"/>
+        <p14:creationId xmlns:p14="http://schemas.microsoft.com/office/powerpoint/2010/main" val="1128923112"/>
       </p:ext>
     </p:extLst>
   </p:cSld>
   <p:clrMap bg1="lt1" tx1="dk1" bg2="lt2" tx2="dk2" accent1="accent1" accent2="accent2" accent3="accent3" accent4="accent4" accent5="accent5" accent6="accent6" hlink="hlink" folHlink="folHlink"/>
   <p:sldLayoutIdLst>
-    <p:sldLayoutId id="2147483685" r:id="rId1"/>
-    <p:sldLayoutId id="2147483686" r:id="rId2"/>
-    <p:sldLayoutId id="2147483687" r:id="rId3"/>
-    <p:sldLayoutId id="2147483688" r:id="rId4"/>
-    <p:sldLayoutId id="2147483689" r:id="rId5"/>
-    <p:sldLayoutId id="2147483690" r:id="rId6"/>
-    <p:sldLayoutId id="2147483691" r:id="rId7"/>
-    <p:sldLayoutId id="2147483692" r:id="rId8"/>
-    <p:sldLayoutId id="2147483693" r:id="rId9"/>
-    <p:sldLayoutId id="2147483694" r:id="rId10"/>
-    <p:sldLayoutId id="2147483695" r:id="rId11"/>
+    <p:sldLayoutId id="2147483697" r:id="rId1"/>
+    <p:sldLayoutId id="2147483698" r:id="rId2"/>
+    <p:sldLayoutId id="2147483699" r:id="rId3"/>
+    <p:sldLayoutId id="2147483700" r:id="rId4"/>
+    <p:sldLayoutId id="2147483701" r:id="rId5"/>
+    <p:sldLayoutId id="2147483702" r:id="rId6"/>
+    <p:sldLayoutId id="2147483703" r:id="rId7"/>
+    <p:sldLayoutId id="2147483704" r:id="rId8"/>
+    <p:sldLayoutId id="2147483705" r:id="rId9"/>
+    <p:sldLayoutId id="2147483706" r:id="rId10"/>
+    <p:sldLayoutId id="2147483707" r:id="rId11"/>
   </p:sldLayoutIdLst>
   <p:txStyles>
     <p:titleStyle>
-      <a:lvl1pPr algn="l" defTabSz="1524030" rtl="0" eaLnBrk="1" latinLnBrk="0" hangingPunct="1">
+      <a:lvl1pPr algn="l" defTabSz="1036290" rtl="0" eaLnBrk="1" latinLnBrk="0" hangingPunct="1">
         <a:lnSpc>
           <a:spcPct val="90000"/>
         </a:lnSpc>
@@ -2681,7 +2683,7 @@
           <a:spcPct val="0"/>
         </a:spcBef>
         <a:buNone/>
-        <a:defRPr sz="7333" kern="1200">
+        <a:defRPr sz="4987" kern="1200">
           <a:solidFill>
             <a:schemeClr val="tx1"/>
           </a:solidFill>
@@ -2692,16 +2694,16 @@
       </a:lvl1pPr>
     </p:titleStyle>
     <p:bodyStyle>
-      <a:lvl1pPr marL="381008" indent="-381008" algn="l" defTabSz="1524030" rtl="0" eaLnBrk="1" latinLnBrk="0" hangingPunct="1">
+      <a:lvl1pPr marL="259072" indent="-259072" algn="l" defTabSz="1036290" rtl="0" eaLnBrk="1" latinLnBrk="0" hangingPunct="1">
         <a:lnSpc>
           <a:spcPct val="90000"/>
         </a:lnSpc>
         <a:spcBef>
-          <a:spcPts val="1667"/>
+          <a:spcPts val="1133"/>
         </a:spcBef>
         <a:buFont typeface="Arial" panose="020B0604020202020204" pitchFamily="34" charset="0"/>
         <a:buChar char="•"/>
-        <a:defRPr sz="4667" kern="1200">
+        <a:defRPr sz="3173" kern="1200">
           <a:solidFill>
             <a:schemeClr val="tx1"/>
           </a:solidFill>
@@ -2710,16 +2712,16 @@
           <a:cs typeface="+mn-cs"/>
         </a:defRPr>
       </a:lvl1pPr>
-      <a:lvl2pPr marL="1143023" indent="-381008" algn="l" defTabSz="1524030" rtl="0" eaLnBrk="1" latinLnBrk="0" hangingPunct="1">
+      <a:lvl2pPr marL="777217" indent="-259072" algn="l" defTabSz="1036290" rtl="0" eaLnBrk="1" latinLnBrk="0" hangingPunct="1">
         <a:lnSpc>
           <a:spcPct val="90000"/>
         </a:lnSpc>
         <a:spcBef>
-          <a:spcPts val="833"/>
+          <a:spcPts val="567"/>
         </a:spcBef>
         <a:buFont typeface="Arial" panose="020B0604020202020204" pitchFamily="34" charset="0"/>
         <a:buChar char="•"/>
-        <a:defRPr sz="4000" kern="1200">
+        <a:defRPr sz="2720" kern="1200">
           <a:solidFill>
             <a:schemeClr val="tx1"/>
           </a:solidFill>
@@ -2728,16 +2730,16 @@
           <a:cs typeface="+mn-cs"/>
         </a:defRPr>
       </a:lvl2pPr>
-      <a:lvl3pPr marL="1905038" indent="-381008" algn="l" defTabSz="1524030" rtl="0" eaLnBrk="1" latinLnBrk="0" hangingPunct="1">
+      <a:lvl3pPr marL="1295362" indent="-259072" algn="l" defTabSz="1036290" rtl="0" eaLnBrk="1" latinLnBrk="0" hangingPunct="1">
         <a:lnSpc>
           <a:spcPct val="90000"/>
         </a:lnSpc>
         <a:spcBef>
-          <a:spcPts val="833"/>
+          <a:spcPts val="567"/>
         </a:spcBef>
         <a:buFont typeface="Arial" panose="020B0604020202020204" pitchFamily="34" charset="0"/>
         <a:buChar char="•"/>
-        <a:defRPr sz="3333" kern="1200">
+        <a:defRPr sz="2267" kern="1200">
           <a:solidFill>
             <a:schemeClr val="tx1"/>
           </a:solidFill>
@@ -2746,16 +2748,16 @@
           <a:cs typeface="+mn-cs"/>
         </a:defRPr>
       </a:lvl3pPr>
-      <a:lvl4pPr marL="2667053" indent="-381008" algn="l" defTabSz="1524030" rtl="0" eaLnBrk="1" latinLnBrk="0" hangingPunct="1">
+      <a:lvl4pPr marL="1813507" indent="-259072" algn="l" defTabSz="1036290" rtl="0" eaLnBrk="1" latinLnBrk="0" hangingPunct="1">
         <a:lnSpc>
           <a:spcPct val="90000"/>
         </a:lnSpc>
         <a:spcBef>
-          <a:spcPts val="833"/>
+          <a:spcPts val="567"/>
         </a:spcBef>
         <a:buFont typeface="Arial" panose="020B0604020202020204" pitchFamily="34" charset="0"/>
         <a:buChar char="•"/>
-        <a:defRPr sz="3000" kern="1200">
+        <a:defRPr sz="2040" kern="1200">
           <a:solidFill>
             <a:schemeClr val="tx1"/>
           </a:solidFill>
@@ -2764,16 +2766,16 @@
           <a:cs typeface="+mn-cs"/>
         </a:defRPr>
       </a:lvl4pPr>
-      <a:lvl5pPr marL="3429069" indent="-381008" algn="l" defTabSz="1524030" rtl="0" eaLnBrk="1" latinLnBrk="0" hangingPunct="1">
+      <a:lvl5pPr marL="2331651" indent="-259072" algn="l" defTabSz="1036290" rtl="0" eaLnBrk="1" latinLnBrk="0" hangingPunct="1">
         <a:lnSpc>
           <a:spcPct val="90000"/>
         </a:lnSpc>
         <a:spcBef>
-          <a:spcPts val="833"/>
+          <a:spcPts val="567"/>
         </a:spcBef>
         <a:buFont typeface="Arial" panose="020B0604020202020204" pitchFamily="34" charset="0"/>
         <a:buChar char="•"/>
-        <a:defRPr sz="3000" kern="1200">
+        <a:defRPr sz="2040" kern="1200">
           <a:solidFill>
             <a:schemeClr val="tx1"/>
           </a:solidFill>
@@ -2782,16 +2784,16 @@
           <a:cs typeface="+mn-cs"/>
         </a:defRPr>
       </a:lvl5pPr>
-      <a:lvl6pPr marL="4191084" indent="-381008" algn="l" defTabSz="1524030" rtl="0" eaLnBrk="1" latinLnBrk="0" hangingPunct="1">
+      <a:lvl6pPr marL="2849796" indent="-259072" algn="l" defTabSz="1036290" rtl="0" eaLnBrk="1" latinLnBrk="0" hangingPunct="1">
         <a:lnSpc>
           <a:spcPct val="90000"/>
         </a:lnSpc>
         <a:spcBef>
-          <a:spcPts val="833"/>
+          <a:spcPts val="567"/>
         </a:spcBef>
         <a:buFont typeface="Arial" panose="020B0604020202020204" pitchFamily="34" charset="0"/>
         <a:buChar char="•"/>
-        <a:defRPr sz="3000" kern="1200">
+        <a:defRPr sz="2040" kern="1200">
           <a:solidFill>
             <a:schemeClr val="tx1"/>
           </a:solidFill>
@@ -2800,16 +2802,16 @@
           <a:cs typeface="+mn-cs"/>
         </a:defRPr>
       </a:lvl6pPr>
-      <a:lvl7pPr marL="4953099" indent="-381008" algn="l" defTabSz="1524030" rtl="0" eaLnBrk="1" latinLnBrk="0" hangingPunct="1">
+      <a:lvl7pPr marL="3367941" indent="-259072" algn="l" defTabSz="1036290" rtl="0" eaLnBrk="1" latinLnBrk="0" hangingPunct="1">
         <a:lnSpc>
           <a:spcPct val="90000"/>
         </a:lnSpc>
         <a:spcBef>
-          <a:spcPts val="833"/>
+          <a:spcPts val="567"/>
         </a:spcBef>
         <a:buFont typeface="Arial" panose="020B0604020202020204" pitchFamily="34" charset="0"/>
         <a:buChar char="•"/>
-        <a:defRPr sz="3000" kern="1200">
+        <a:defRPr sz="2040" kern="1200">
           <a:solidFill>
             <a:schemeClr val="tx1"/>
           </a:solidFill>
@@ -2818,16 +2820,16 @@
           <a:cs typeface="+mn-cs"/>
         </a:defRPr>
       </a:lvl7pPr>
-      <a:lvl8pPr marL="5715114" indent="-381008" algn="l" defTabSz="1524030" rtl="0" eaLnBrk="1" latinLnBrk="0" hangingPunct="1">
+      <a:lvl8pPr marL="3886086" indent="-259072" algn="l" defTabSz="1036290" rtl="0" eaLnBrk="1" latinLnBrk="0" hangingPunct="1">
         <a:lnSpc>
           <a:spcPct val="90000"/>
         </a:lnSpc>
         <a:spcBef>
-          <a:spcPts val="833"/>
+          <a:spcPts val="567"/>
         </a:spcBef>
         <a:buFont typeface="Arial" panose="020B0604020202020204" pitchFamily="34" charset="0"/>
         <a:buChar char="•"/>
-        <a:defRPr sz="3000" kern="1200">
+        <a:defRPr sz="2040" kern="1200">
           <a:solidFill>
             <a:schemeClr val="tx1"/>
           </a:solidFill>
@@ -2836,16 +2838,16 @@
           <a:cs typeface="+mn-cs"/>
         </a:defRPr>
       </a:lvl8pPr>
-      <a:lvl9pPr marL="6477130" indent="-381008" algn="l" defTabSz="1524030" rtl="0" eaLnBrk="1" latinLnBrk="0" hangingPunct="1">
+      <a:lvl9pPr marL="4404230" indent="-259072" algn="l" defTabSz="1036290" rtl="0" eaLnBrk="1" latinLnBrk="0" hangingPunct="1">
         <a:lnSpc>
           <a:spcPct val="90000"/>
         </a:lnSpc>
         <a:spcBef>
-          <a:spcPts val="833"/>
+          <a:spcPts val="567"/>
         </a:spcBef>
         <a:buFont typeface="Arial" panose="020B0604020202020204" pitchFamily="34" charset="0"/>
         <a:buChar char="•"/>
-        <a:defRPr sz="3000" kern="1200">
+        <a:defRPr sz="2040" kern="1200">
           <a:solidFill>
             <a:schemeClr val="tx1"/>
           </a:solidFill>
@@ -2859,8 +2861,8 @@
       <a:defPPr>
         <a:defRPr lang="en-US"/>
       </a:defPPr>
-      <a:lvl1pPr marL="0" algn="l" defTabSz="1524030" rtl="0" eaLnBrk="1" latinLnBrk="0" hangingPunct="1">
-        <a:defRPr sz="3000" kern="1200">
+      <a:lvl1pPr marL="0" algn="l" defTabSz="1036290" rtl="0" eaLnBrk="1" latinLnBrk="0" hangingPunct="1">
+        <a:defRPr sz="2040" kern="1200">
           <a:solidFill>
             <a:schemeClr val="tx1"/>
           </a:solidFill>
@@ -2869,8 +2871,8 @@
           <a:cs typeface="+mn-cs"/>
         </a:defRPr>
       </a:lvl1pPr>
-      <a:lvl2pPr marL="762015" algn="l" defTabSz="1524030" rtl="0" eaLnBrk="1" latinLnBrk="0" hangingPunct="1">
-        <a:defRPr sz="3000" kern="1200">
+      <a:lvl2pPr marL="518145" algn="l" defTabSz="1036290" rtl="0" eaLnBrk="1" latinLnBrk="0" hangingPunct="1">
+        <a:defRPr sz="2040" kern="1200">
           <a:solidFill>
             <a:schemeClr val="tx1"/>
           </a:solidFill>
@@ -2879,8 +2881,8 @@
           <a:cs typeface="+mn-cs"/>
         </a:defRPr>
       </a:lvl2pPr>
-      <a:lvl3pPr marL="1524030" algn="l" defTabSz="1524030" rtl="0" eaLnBrk="1" latinLnBrk="0" hangingPunct="1">
-        <a:defRPr sz="3000" kern="1200">
+      <a:lvl3pPr marL="1036290" algn="l" defTabSz="1036290" rtl="0" eaLnBrk="1" latinLnBrk="0" hangingPunct="1">
+        <a:defRPr sz="2040" kern="1200">
           <a:solidFill>
             <a:schemeClr val="tx1"/>
           </a:solidFill>
@@ -2889,8 +2891,8 @@
           <a:cs typeface="+mn-cs"/>
         </a:defRPr>
       </a:lvl3pPr>
-      <a:lvl4pPr marL="2286046" algn="l" defTabSz="1524030" rtl="0" eaLnBrk="1" latinLnBrk="0" hangingPunct="1">
-        <a:defRPr sz="3000" kern="1200">
+      <a:lvl4pPr marL="1554434" algn="l" defTabSz="1036290" rtl="0" eaLnBrk="1" latinLnBrk="0" hangingPunct="1">
+        <a:defRPr sz="2040" kern="1200">
           <a:solidFill>
             <a:schemeClr val="tx1"/>
           </a:solidFill>
@@ -2899,8 +2901,8 @@
           <a:cs typeface="+mn-cs"/>
         </a:defRPr>
       </a:lvl4pPr>
-      <a:lvl5pPr marL="3048061" algn="l" defTabSz="1524030" rtl="0" eaLnBrk="1" latinLnBrk="0" hangingPunct="1">
-        <a:defRPr sz="3000" kern="1200">
+      <a:lvl5pPr marL="2072579" algn="l" defTabSz="1036290" rtl="0" eaLnBrk="1" latinLnBrk="0" hangingPunct="1">
+        <a:defRPr sz="2040" kern="1200">
           <a:solidFill>
             <a:schemeClr val="tx1"/>
           </a:solidFill>
@@ -2909,8 +2911,8 @@
           <a:cs typeface="+mn-cs"/>
         </a:defRPr>
       </a:lvl5pPr>
-      <a:lvl6pPr marL="3810076" algn="l" defTabSz="1524030" rtl="0" eaLnBrk="1" latinLnBrk="0" hangingPunct="1">
-        <a:defRPr sz="3000" kern="1200">
+      <a:lvl6pPr marL="2590724" algn="l" defTabSz="1036290" rtl="0" eaLnBrk="1" latinLnBrk="0" hangingPunct="1">
+        <a:defRPr sz="2040" kern="1200">
           <a:solidFill>
             <a:schemeClr val="tx1"/>
           </a:solidFill>
@@ -2919,8 +2921,8 @@
           <a:cs typeface="+mn-cs"/>
         </a:defRPr>
       </a:lvl6pPr>
-      <a:lvl7pPr marL="4572091" algn="l" defTabSz="1524030" rtl="0" eaLnBrk="1" latinLnBrk="0" hangingPunct="1">
-        <a:defRPr sz="3000" kern="1200">
+      <a:lvl7pPr marL="3108869" algn="l" defTabSz="1036290" rtl="0" eaLnBrk="1" latinLnBrk="0" hangingPunct="1">
+        <a:defRPr sz="2040" kern="1200">
           <a:solidFill>
             <a:schemeClr val="tx1"/>
           </a:solidFill>
@@ -2929,8 +2931,8 @@
           <a:cs typeface="+mn-cs"/>
         </a:defRPr>
       </a:lvl7pPr>
-      <a:lvl8pPr marL="5334107" algn="l" defTabSz="1524030" rtl="0" eaLnBrk="1" latinLnBrk="0" hangingPunct="1">
-        <a:defRPr sz="3000" kern="1200">
+      <a:lvl8pPr marL="3627013" algn="l" defTabSz="1036290" rtl="0" eaLnBrk="1" latinLnBrk="0" hangingPunct="1">
+        <a:defRPr sz="2040" kern="1200">
           <a:solidFill>
             <a:schemeClr val="tx1"/>
           </a:solidFill>
@@ -2939,8 +2941,8 @@
           <a:cs typeface="+mn-cs"/>
         </a:defRPr>
       </a:lvl8pPr>
-      <a:lvl9pPr marL="6096122" algn="l" defTabSz="1524030" rtl="0" eaLnBrk="1" latinLnBrk="0" hangingPunct="1">
-        <a:defRPr sz="3000" kern="1200">
+      <a:lvl9pPr marL="4145158" algn="l" defTabSz="1036290" rtl="0" eaLnBrk="1" latinLnBrk="0" hangingPunct="1">
+        <a:defRPr sz="2040" kern="1200">
           <a:solidFill>
             <a:schemeClr val="tx1"/>
           </a:solidFill>
@@ -3063,10 +3065,10 @@
       </p:pic>
       <p:pic>
         <p:nvPicPr>
-          <p:cNvPr id="8" name="Picture 7">
+          <p:cNvPr id="24" name="Picture 23">
             <a:extLst>
               <a:ext uri="{FF2B5EF4-FFF2-40B4-BE49-F238E27FC236}">
-                <a16:creationId xmlns:a16="http://schemas.microsoft.com/office/drawing/2014/main" id="{7D464BB6-0E94-E92D-AC0B-BD182875DB10}"/>
+                <a16:creationId xmlns:a16="http://schemas.microsoft.com/office/drawing/2014/main" id="{00143626-0CF6-4979-7ED4-FACE9ECB4C59}"/>
               </a:ext>
             </a:extLst>
           </p:cNvPr>
@@ -3083,67 +3085,7 @@
         </p:blipFill>
         <p:spPr>
           <a:xfrm>
-            <a:off x="0" y="7772400"/>
-            <a:ext cx="5486400" cy="3657600"/>
-          </a:xfrm>
-          <a:prstGeom prst="rect">
-            <a:avLst/>
-          </a:prstGeom>
-        </p:spPr>
-      </p:pic>
-      <p:pic>
-        <p:nvPicPr>
-          <p:cNvPr id="24" name="Picture 23">
-            <a:extLst>
-              <a:ext uri="{FF2B5EF4-FFF2-40B4-BE49-F238E27FC236}">
-                <a16:creationId xmlns:a16="http://schemas.microsoft.com/office/drawing/2014/main" id="{00143626-0CF6-4979-7ED4-FACE9ECB4C59}"/>
-              </a:ext>
-            </a:extLst>
-          </p:cNvPr>
-          <p:cNvPicPr>
-            <a:picLocks noChangeAspect="1"/>
-          </p:cNvPicPr>
-          <p:nvPr/>
-        </p:nvPicPr>
-        <p:blipFill>
-          <a:blip r:embed="rId6"/>
-          <a:stretch>
-            <a:fillRect/>
-          </a:stretch>
-        </p:blipFill>
-        <p:spPr>
-          <a:xfrm>
             <a:off x="10972800" y="4114800"/>
-            <a:ext cx="5486400" cy="3657600"/>
-          </a:xfrm>
-          <a:prstGeom prst="rect">
-            <a:avLst/>
-          </a:prstGeom>
-        </p:spPr>
-      </p:pic>
-      <p:pic>
-        <p:nvPicPr>
-          <p:cNvPr id="26" name="Picture 25">
-            <a:extLst>
-              <a:ext uri="{FF2B5EF4-FFF2-40B4-BE49-F238E27FC236}">
-                <a16:creationId xmlns:a16="http://schemas.microsoft.com/office/drawing/2014/main" id="{28C6EDB7-3666-518D-AA68-15AA7B737D98}"/>
-              </a:ext>
-            </a:extLst>
-          </p:cNvPr>
-          <p:cNvPicPr>
-            <a:picLocks noChangeAspect="1"/>
-          </p:cNvPicPr>
-          <p:nvPr/>
-        </p:nvPicPr>
-        <p:blipFill>
-          <a:blip r:embed="rId7"/>
-          <a:stretch>
-            <a:fillRect/>
-          </a:stretch>
-        </p:blipFill>
-        <p:spPr>
-          <a:xfrm>
-            <a:off x="10972800" y="7772400"/>
             <a:ext cx="5486400" cy="3657600"/>
           </a:xfrm>
           <a:prstGeom prst="rect">
@@ -3218,7 +3160,7 @@
           <p:nvPr/>
         </p:nvPicPr>
         <p:blipFill>
-          <a:blip r:embed="rId8"/>
+          <a:blip r:embed="rId6"/>
           <a:stretch>
             <a:fillRect/>
           </a:stretch>
@@ -3299,7 +3241,7 @@
         </p:nvSpPr>
         <p:spPr>
           <a:xfrm>
-            <a:off x="2" y="0"/>
+            <a:off x="3" y="0"/>
             <a:ext cx="5486399" cy="461665"/>
           </a:xfrm>
           <a:prstGeom prst="rect">
@@ -3335,7 +3277,7 @@
         </p:nvSpPr>
         <p:spPr>
           <a:xfrm>
-            <a:off x="5486403" y="0"/>
+            <a:off x="5486404" y="0"/>
             <a:ext cx="5486399" cy="461665"/>
           </a:xfrm>
           <a:prstGeom prst="rect">
@@ -3371,7 +3313,7 @@
         </p:nvSpPr>
         <p:spPr>
           <a:xfrm>
-            <a:off x="10972801" y="0"/>
+            <a:off x="10972802" y="0"/>
             <a:ext cx="5486399" cy="461665"/>
           </a:xfrm>
           <a:prstGeom prst="rect">
@@ -3408,7 +3350,7 @@
           <p:nvPr/>
         </p:nvPicPr>
         <p:blipFill>
-          <a:blip r:embed="rId9"/>
+          <a:blip r:embed="rId7"/>
           <a:stretch>
             <a:fillRect/>
           </a:stretch>
@@ -3416,36 +3358,6 @@
         <p:spPr>
           <a:xfrm>
             <a:off x="5486400" y="4114800"/>
-            <a:ext cx="5486400" cy="3657600"/>
-          </a:xfrm>
-          <a:prstGeom prst="rect">
-            <a:avLst/>
-          </a:prstGeom>
-        </p:spPr>
-      </p:pic>
-      <p:pic>
-        <p:nvPicPr>
-          <p:cNvPr id="9" name="Picture 8">
-            <a:extLst>
-              <a:ext uri="{FF2B5EF4-FFF2-40B4-BE49-F238E27FC236}">
-                <a16:creationId xmlns:a16="http://schemas.microsoft.com/office/drawing/2014/main" id="{4820BE5E-922E-F8C8-3CB6-5315E8CEDC7A}"/>
-              </a:ext>
-            </a:extLst>
-          </p:cNvPr>
-          <p:cNvPicPr>
-            <a:picLocks noChangeAspect="1"/>
-          </p:cNvPicPr>
-          <p:nvPr/>
-        </p:nvPicPr>
-        <p:blipFill>
-          <a:blip r:embed="rId10"/>
-          <a:stretch>
-            <a:fillRect/>
-          </a:stretch>
-        </p:blipFill>
-        <p:spPr>
-          <a:xfrm>
-            <a:off x="5486400" y="7767935"/>
             <a:ext cx="5486400" cy="3657600"/>
           </a:xfrm>
           <a:prstGeom prst="rect">
